--- a/(Advanced) Multimedia Information Processing and Communications/23 (14) Digital Watermarking/Digital Watermarking.pptx
+++ b/(Advanced) Multimedia Information Processing and Communications/23 (14) Digital Watermarking/Digital Watermarking.pptx
@@ -59,13 +59,6 @@
       <p:font typeface="Avenir" panose="02000503020000020003" pitchFamily="2" charset="0"/>
       <p:regular r:id="rId43"/>
       <p:italic r:id="rId44"/>
-    </p:embeddedFont>
-    <p:embeddedFont>
-      <p:font typeface="Calibri" panose="020F0502020204030204" pitchFamily="34" charset="0"/>
-      <p:regular r:id="rId45"/>
-      <p:bold r:id="rId46"/>
-      <p:italic r:id="rId47"/>
-      <p:boldItalic r:id="rId48"/>
     </p:embeddedFont>
   </p:embeddedFontLst>
   <p:defaultTextStyle>
@@ -302,7 +295,7 @@
       <p15:sldGuideLst xmlns:p15="http://schemas.microsoft.com/office/powerpoint/2012/main"/>
     </p:ext>
     <p:ext uri="http://customooxmlschemas.google.com/">
-      <go:slidesCustomData xmlns:go="http://customooxmlschemas.google.com/" xmlns:p15="http://schemas.microsoft.com/office/powerpoint/2012/main" xmlns:p14="http://schemas.microsoft.com/office/powerpoint/2010/main" xmlns:com="http://schemas.openxmlformats.org/drawingml/2006/compatibility" xmlns:pvml="urn:schemas-microsoft-com:office:powerpoint" xmlns:v="urn:schemas-microsoft-com:vml" xmlns:o="urn:schemas-microsoft-com:office:office" xmlns:dgm="http://schemas.openxmlformats.org/drawingml/2006/diagram" xmlns:c="http://schemas.openxmlformats.org/drawingml/2006/chart" xmlns:mv="urn:schemas-microsoft-com:mac:vml" xmlns:mc="http://schemas.openxmlformats.org/markup-compatibility/2006" xmlns="" r:id="rId49" roundtripDataSignature="AMtx7miaaBwd14tUSS2jnbCjxYzOzOAoOA=="/>
+      <go:slidesCustomData xmlns="" xmlns:mc="http://schemas.openxmlformats.org/markup-compatibility/2006" xmlns:mv="urn:schemas-microsoft-com:mac:vml" xmlns:c="http://schemas.openxmlformats.org/drawingml/2006/chart" xmlns:dgm="http://schemas.openxmlformats.org/drawingml/2006/diagram" xmlns:o="urn:schemas-microsoft-com:office:office" xmlns:v="urn:schemas-microsoft-com:vml" xmlns:pvml="urn:schemas-microsoft-com:office:powerpoint" xmlns:com="http://schemas.openxmlformats.org/drawingml/2006/compatibility" xmlns:p14="http://schemas.microsoft.com/office/powerpoint/2010/main" xmlns:p15="http://schemas.microsoft.com/office/powerpoint/2012/main" xmlns:go="http://customooxmlschemas.google.com/" r:id="rId49" roundtripDataSignature="AMtx7miaaBwd14tUSS2jnbCjxYzOzOAoOA=="/>
     </p:ext>
   </p:extLst>
 </p:presentation>
@@ -5405,7 +5398,7 @@
         </a:prstGeom>
         <a:solidFill>
           <a:schemeClr val="accent5">
-            <a:hueOff val="814257"/>
+            <a:hueOff val="814256"/>
             <a:satOff val="2799"/>
             <a:lumOff val="-13432"/>
             <a:alphaOff val="0"/>
@@ -5414,7 +5407,7 @@
         <a:ln w="25400" cap="flat" cmpd="sng" algn="ctr">
           <a:solidFill>
             <a:schemeClr val="accent5">
-              <a:hueOff val="814257"/>
+              <a:hueOff val="814256"/>
               <a:satOff val="2799"/>
               <a:lumOff val="-13432"/>
               <a:alphaOff val="0"/>
@@ -5707,7 +5700,7 @@
         </a:prstGeom>
         <a:solidFill>
           <a:schemeClr val="accent5">
-            <a:hueOff val="1628513"/>
+            <a:hueOff val="1628512"/>
             <a:satOff val="5598"/>
             <a:lumOff val="-26863"/>
             <a:alphaOff val="0"/>
@@ -5716,7 +5709,7 @@
         <a:ln w="25400" cap="flat" cmpd="sng" algn="ctr">
           <a:solidFill>
             <a:schemeClr val="accent5">
-              <a:hueOff val="1628513"/>
+              <a:hueOff val="1628512"/>
               <a:satOff val="5598"/>
               <a:lumOff val="-26863"/>
               <a:alphaOff val="0"/>
@@ -6009,7 +6002,7 @@
         </a:prstGeom>
         <a:solidFill>
           <a:schemeClr val="accent5">
-            <a:hueOff val="2442770"/>
+            <a:hueOff val="2442768"/>
             <a:satOff val="8397"/>
             <a:lumOff val="-40295"/>
             <a:alphaOff val="0"/>
@@ -6018,7 +6011,7 @@
         <a:ln w="25400" cap="flat" cmpd="sng" algn="ctr">
           <a:solidFill>
             <a:schemeClr val="accent5">
-              <a:hueOff val="2442770"/>
+              <a:hueOff val="2442768"/>
               <a:satOff val="8397"/>
               <a:lumOff val="-40295"/>
               <a:alphaOff val="0"/>
@@ -6311,7 +6304,7 @@
         </a:prstGeom>
         <a:solidFill>
           <a:schemeClr val="accent5">
-            <a:hueOff val="3257026"/>
+            <a:hueOff val="3257024"/>
             <a:satOff val="11196"/>
             <a:lumOff val="-53726"/>
             <a:alphaOff val="0"/>
@@ -6320,7 +6313,7 @@
         <a:ln w="25400" cap="flat" cmpd="sng" algn="ctr">
           <a:solidFill>
             <a:schemeClr val="accent5">
-              <a:hueOff val="3257026"/>
+              <a:hueOff val="3257024"/>
               <a:satOff val="11196"/>
               <a:lumOff val="-53726"/>
               <a:alphaOff val="0"/>
@@ -39121,15 +39114,15 @@
               <a:buFont typeface="Arial"/>
               <a:buNone/>
             </a:pPr>
-            <a:r>
-              <a:rPr lang="en-US" sz="1370">
+            <a:fld id="{DAE75B82-FC15-014D-9238-FC5B5C3F48AD}" type="datetime1">
+              <a:rPr lang="pl-PL" sz="1370" smtClean="0">
                 <a:solidFill>
                   <a:srgbClr val="808080"/>
                 </a:solidFill>
               </a:rPr>
-              <a:t>Kraków</a:t>
-            </a:r>
-            <a:endParaRPr sz="1370" b="0" i="0" u="none" strike="noStrike" cap="none">
+              <a:t>13.12.2023</a:t>
+            </a:fld>
+            <a:endParaRPr sz="1370" b="0" i="0" u="none" strike="noStrike" cap="none" dirty="0">
               <a:solidFill>
                 <a:srgbClr val="808080"/>
               </a:solidFill>
@@ -40047,7 +40040,7 @@
         <p:fade thruBlk="1"/>
       </p:transition>
     </mc:Choice>
-    <mc:Fallback xmlns:p15="http://schemas.microsoft.com/office/powerpoint/2012/main" xmlns:com="http://schemas.openxmlformats.org/drawingml/2006/compatibility" xmlns:pvml="urn:schemas-microsoft-com:office:powerpoint" xmlns:v="urn:schemas-microsoft-com:vml" xmlns:o="urn:schemas-microsoft-com:office:office" xmlns:dgm="http://schemas.openxmlformats.org/drawingml/2006/diagram" xmlns:c="http://schemas.openxmlformats.org/drawingml/2006/chart" xmlns:mv="urn:schemas-microsoft-com:mac:vml" xmlns="">
+    <mc:Fallback xmlns="" xmlns:mv="urn:schemas-microsoft-com:mac:vml" xmlns:c="http://schemas.openxmlformats.org/drawingml/2006/chart" xmlns:dgm="http://schemas.openxmlformats.org/drawingml/2006/diagram" xmlns:o="urn:schemas-microsoft-com:office:office" xmlns:v="urn:schemas-microsoft-com:vml" xmlns:pvml="urn:schemas-microsoft-com:office:powerpoint" xmlns:com="http://schemas.openxmlformats.org/drawingml/2006/compatibility" xmlns:p15="http://schemas.microsoft.com/office/powerpoint/2012/main">
       <p:transition spd="slow">
         <p:fade/>
       </p:transition>
@@ -40421,7 +40414,7 @@
         <p:fade thruBlk="1"/>
       </p:transition>
     </mc:Choice>
-    <mc:Fallback xmlns:p15="http://schemas.microsoft.com/office/powerpoint/2012/main" xmlns:com="http://schemas.openxmlformats.org/drawingml/2006/compatibility" xmlns:pvml="urn:schemas-microsoft-com:office:powerpoint" xmlns:v="urn:schemas-microsoft-com:vml" xmlns:o="urn:schemas-microsoft-com:office:office" xmlns:dgm="http://schemas.openxmlformats.org/drawingml/2006/diagram" xmlns:c="http://schemas.openxmlformats.org/drawingml/2006/chart" xmlns:mv="urn:schemas-microsoft-com:mac:vml" xmlns="">
+    <mc:Fallback xmlns="" xmlns:mv="urn:schemas-microsoft-com:mac:vml" xmlns:c="http://schemas.openxmlformats.org/drawingml/2006/chart" xmlns:dgm="http://schemas.openxmlformats.org/drawingml/2006/diagram" xmlns:o="urn:schemas-microsoft-com:office:office" xmlns:v="urn:schemas-microsoft-com:vml" xmlns:pvml="urn:schemas-microsoft-com:office:powerpoint" xmlns:com="http://schemas.openxmlformats.org/drawingml/2006/compatibility" xmlns:p15="http://schemas.microsoft.com/office/powerpoint/2012/main">
       <p:transition spd="slow">
         <p:fade/>
       </p:transition>
@@ -41034,7 +41027,7 @@
         <p:fade thruBlk="1"/>
       </p:transition>
     </mc:Choice>
-    <mc:Fallback xmlns:p15="http://schemas.microsoft.com/office/powerpoint/2012/main" xmlns:com="http://schemas.openxmlformats.org/drawingml/2006/compatibility" xmlns:pvml="urn:schemas-microsoft-com:office:powerpoint" xmlns:v="urn:schemas-microsoft-com:vml" xmlns:o="urn:schemas-microsoft-com:office:office" xmlns:dgm="http://schemas.openxmlformats.org/drawingml/2006/diagram" xmlns:c="http://schemas.openxmlformats.org/drawingml/2006/chart" xmlns:mv="urn:schemas-microsoft-com:mac:vml" xmlns="">
+    <mc:Fallback xmlns="" xmlns:mv="urn:schemas-microsoft-com:mac:vml" xmlns:c="http://schemas.openxmlformats.org/drawingml/2006/chart" xmlns:dgm="http://schemas.openxmlformats.org/drawingml/2006/diagram" xmlns:o="urn:schemas-microsoft-com:office:office" xmlns:v="urn:schemas-microsoft-com:vml" xmlns:pvml="urn:schemas-microsoft-com:office:powerpoint" xmlns:com="http://schemas.openxmlformats.org/drawingml/2006/compatibility" xmlns:p15="http://schemas.microsoft.com/office/powerpoint/2012/main">
       <p:transition spd="slow">
         <p:fade/>
       </p:transition>
@@ -41641,7 +41634,7 @@
         <p:fade thruBlk="1"/>
       </p:transition>
     </mc:Choice>
-    <mc:Fallback xmlns:p15="http://schemas.microsoft.com/office/powerpoint/2012/main" xmlns:com="http://schemas.openxmlformats.org/drawingml/2006/compatibility" xmlns:pvml="urn:schemas-microsoft-com:office:powerpoint" xmlns:v="urn:schemas-microsoft-com:vml" xmlns:o="urn:schemas-microsoft-com:office:office" xmlns:dgm="http://schemas.openxmlformats.org/drawingml/2006/diagram" xmlns:c="http://schemas.openxmlformats.org/drawingml/2006/chart" xmlns:mv="urn:schemas-microsoft-com:mac:vml" xmlns="">
+    <mc:Fallback xmlns="" xmlns:mv="urn:schemas-microsoft-com:mac:vml" xmlns:c="http://schemas.openxmlformats.org/drawingml/2006/chart" xmlns:dgm="http://schemas.openxmlformats.org/drawingml/2006/diagram" xmlns:o="urn:schemas-microsoft-com:office:office" xmlns:v="urn:schemas-microsoft-com:vml" xmlns:pvml="urn:schemas-microsoft-com:office:powerpoint" xmlns:com="http://schemas.openxmlformats.org/drawingml/2006/compatibility" xmlns:p15="http://schemas.microsoft.com/office/powerpoint/2012/main">
       <p:transition spd="slow">
         <p:fade/>
       </p:transition>
@@ -41969,7 +41962,7 @@
         <p:fade thruBlk="1"/>
       </p:transition>
     </mc:Choice>
-    <mc:Fallback xmlns:p15="http://schemas.microsoft.com/office/powerpoint/2012/main" xmlns:com="http://schemas.openxmlformats.org/drawingml/2006/compatibility" xmlns:pvml="urn:schemas-microsoft-com:office:powerpoint" xmlns:v="urn:schemas-microsoft-com:vml" xmlns:o="urn:schemas-microsoft-com:office:office" xmlns:dgm="http://schemas.openxmlformats.org/drawingml/2006/diagram" xmlns:c="http://schemas.openxmlformats.org/drawingml/2006/chart" xmlns:mv="urn:schemas-microsoft-com:mac:vml" xmlns="">
+    <mc:Fallback xmlns="" xmlns:mv="urn:schemas-microsoft-com:mac:vml" xmlns:c="http://schemas.openxmlformats.org/drawingml/2006/chart" xmlns:dgm="http://schemas.openxmlformats.org/drawingml/2006/diagram" xmlns:o="urn:schemas-microsoft-com:office:office" xmlns:v="urn:schemas-microsoft-com:vml" xmlns:pvml="urn:schemas-microsoft-com:office:powerpoint" xmlns:com="http://schemas.openxmlformats.org/drawingml/2006/compatibility" xmlns:p15="http://schemas.microsoft.com/office/powerpoint/2012/main">
       <p:transition spd="slow">
         <p:fade/>
       </p:transition>
@@ -42370,7 +42363,7 @@
         <p:fade thruBlk="1"/>
       </p:transition>
     </mc:Choice>
-    <mc:Fallback xmlns:p15="http://schemas.microsoft.com/office/powerpoint/2012/main" xmlns:com="http://schemas.openxmlformats.org/drawingml/2006/compatibility" xmlns:pvml="urn:schemas-microsoft-com:office:powerpoint" xmlns:v="urn:schemas-microsoft-com:vml" xmlns:o="urn:schemas-microsoft-com:office:office" xmlns:dgm="http://schemas.openxmlformats.org/drawingml/2006/diagram" xmlns:c="http://schemas.openxmlformats.org/drawingml/2006/chart" xmlns:mv="urn:schemas-microsoft-com:mac:vml" xmlns="">
+    <mc:Fallback xmlns="" xmlns:mv="urn:schemas-microsoft-com:mac:vml" xmlns:c="http://schemas.openxmlformats.org/drawingml/2006/chart" xmlns:dgm="http://schemas.openxmlformats.org/drawingml/2006/diagram" xmlns:o="urn:schemas-microsoft-com:office:office" xmlns:v="urn:schemas-microsoft-com:vml" xmlns:pvml="urn:schemas-microsoft-com:office:powerpoint" xmlns:com="http://schemas.openxmlformats.org/drawingml/2006/compatibility" xmlns:p15="http://schemas.microsoft.com/office/powerpoint/2012/main">
       <p:transition spd="slow">
         <p:fade/>
       </p:transition>
@@ -42819,7 +42812,7 @@
         <p:fade thruBlk="1"/>
       </p:transition>
     </mc:Choice>
-    <mc:Fallback xmlns:p15="http://schemas.microsoft.com/office/powerpoint/2012/main" xmlns:com="http://schemas.openxmlformats.org/drawingml/2006/compatibility" xmlns:pvml="urn:schemas-microsoft-com:office:powerpoint" xmlns:v="urn:schemas-microsoft-com:vml" xmlns:o="urn:schemas-microsoft-com:office:office" xmlns:dgm="http://schemas.openxmlformats.org/drawingml/2006/diagram" xmlns:c="http://schemas.openxmlformats.org/drawingml/2006/chart" xmlns:mv="urn:schemas-microsoft-com:mac:vml" xmlns="">
+    <mc:Fallback xmlns="" xmlns:mv="urn:schemas-microsoft-com:mac:vml" xmlns:c="http://schemas.openxmlformats.org/drawingml/2006/chart" xmlns:dgm="http://schemas.openxmlformats.org/drawingml/2006/diagram" xmlns:o="urn:schemas-microsoft-com:office:office" xmlns:v="urn:schemas-microsoft-com:vml" xmlns:pvml="urn:schemas-microsoft-com:office:powerpoint" xmlns:com="http://schemas.openxmlformats.org/drawingml/2006/compatibility" xmlns:p15="http://schemas.microsoft.com/office/powerpoint/2012/main">
       <p:transition spd="slow">
         <p:fade/>
       </p:transition>
@@ -43077,7 +43070,7 @@
         <p:fade thruBlk="1"/>
       </p:transition>
     </mc:Choice>
-    <mc:Fallback xmlns:p15="http://schemas.microsoft.com/office/powerpoint/2012/main" xmlns:com="http://schemas.openxmlformats.org/drawingml/2006/compatibility" xmlns:pvml="urn:schemas-microsoft-com:office:powerpoint" xmlns:v="urn:schemas-microsoft-com:vml" xmlns:o="urn:schemas-microsoft-com:office:office" xmlns:dgm="http://schemas.openxmlformats.org/drawingml/2006/diagram" xmlns:c="http://schemas.openxmlformats.org/drawingml/2006/chart" xmlns:mv="urn:schemas-microsoft-com:mac:vml" xmlns="">
+    <mc:Fallback xmlns="" xmlns:mv="urn:schemas-microsoft-com:mac:vml" xmlns:c="http://schemas.openxmlformats.org/drawingml/2006/chart" xmlns:dgm="http://schemas.openxmlformats.org/drawingml/2006/diagram" xmlns:o="urn:schemas-microsoft-com:office:office" xmlns:v="urn:schemas-microsoft-com:vml" xmlns:pvml="urn:schemas-microsoft-com:office:powerpoint" xmlns:com="http://schemas.openxmlformats.org/drawingml/2006/compatibility" xmlns:p15="http://schemas.microsoft.com/office/powerpoint/2012/main">
       <p:transition spd="slow">
         <p:fade/>
       </p:transition>
@@ -43796,7 +43789,7 @@
         <p:fade thruBlk="1"/>
       </p:transition>
     </mc:Choice>
-    <mc:Fallback xmlns:p15="http://schemas.microsoft.com/office/powerpoint/2012/main" xmlns:com="http://schemas.openxmlformats.org/drawingml/2006/compatibility" xmlns:pvml="urn:schemas-microsoft-com:office:powerpoint" xmlns:v="urn:schemas-microsoft-com:vml" xmlns:o="urn:schemas-microsoft-com:office:office" xmlns:dgm="http://schemas.openxmlformats.org/drawingml/2006/diagram" xmlns:c="http://schemas.openxmlformats.org/drawingml/2006/chart" xmlns:mv="urn:schemas-microsoft-com:mac:vml" xmlns="">
+    <mc:Fallback xmlns="" xmlns:mv="urn:schemas-microsoft-com:mac:vml" xmlns:c="http://schemas.openxmlformats.org/drawingml/2006/chart" xmlns:dgm="http://schemas.openxmlformats.org/drawingml/2006/diagram" xmlns:o="urn:schemas-microsoft-com:office:office" xmlns:v="urn:schemas-microsoft-com:vml" xmlns:pvml="urn:schemas-microsoft-com:office:powerpoint" xmlns:com="http://schemas.openxmlformats.org/drawingml/2006/compatibility" xmlns:p15="http://schemas.microsoft.com/office/powerpoint/2012/main">
       <p:transition spd="slow">
         <p:fade/>
       </p:transition>
@@ -44164,7 +44157,7 @@
         <p:fade thruBlk="1"/>
       </p:transition>
     </mc:Choice>
-    <mc:Fallback xmlns:p15="http://schemas.microsoft.com/office/powerpoint/2012/main" xmlns:com="http://schemas.openxmlformats.org/drawingml/2006/compatibility" xmlns:pvml="urn:schemas-microsoft-com:office:powerpoint" xmlns:v="urn:schemas-microsoft-com:vml" xmlns:o="urn:schemas-microsoft-com:office:office" xmlns:dgm="http://schemas.openxmlformats.org/drawingml/2006/diagram" xmlns:c="http://schemas.openxmlformats.org/drawingml/2006/chart" xmlns:mv="urn:schemas-microsoft-com:mac:vml" xmlns="">
+    <mc:Fallback xmlns="" xmlns:mv="urn:schemas-microsoft-com:mac:vml" xmlns:c="http://schemas.openxmlformats.org/drawingml/2006/chart" xmlns:dgm="http://schemas.openxmlformats.org/drawingml/2006/diagram" xmlns:o="urn:schemas-microsoft-com:office:office" xmlns:v="urn:schemas-microsoft-com:vml" xmlns:pvml="urn:schemas-microsoft-com:office:powerpoint" xmlns:com="http://schemas.openxmlformats.org/drawingml/2006/compatibility" xmlns:p15="http://schemas.microsoft.com/office/powerpoint/2012/main">
       <p:transition spd="slow">
         <p:fade/>
       </p:transition>
@@ -44738,7 +44731,7 @@
         <p:fade thruBlk="1"/>
       </p:transition>
     </mc:Choice>
-    <mc:Fallback xmlns:p15="http://schemas.microsoft.com/office/powerpoint/2012/main" xmlns:com="http://schemas.openxmlformats.org/drawingml/2006/compatibility" xmlns:pvml="urn:schemas-microsoft-com:office:powerpoint" xmlns:v="urn:schemas-microsoft-com:vml" xmlns:o="urn:schemas-microsoft-com:office:office" xmlns:dgm="http://schemas.openxmlformats.org/drawingml/2006/diagram" xmlns:c="http://schemas.openxmlformats.org/drawingml/2006/chart" xmlns:mv="urn:schemas-microsoft-com:mac:vml" xmlns="">
+    <mc:Fallback xmlns="" xmlns:mv="urn:schemas-microsoft-com:mac:vml" xmlns:c="http://schemas.openxmlformats.org/drawingml/2006/chart" xmlns:dgm="http://schemas.openxmlformats.org/drawingml/2006/diagram" xmlns:o="urn:schemas-microsoft-com:office:office" xmlns:v="urn:schemas-microsoft-com:vml" xmlns:pvml="urn:schemas-microsoft-com:office:powerpoint" xmlns:com="http://schemas.openxmlformats.org/drawingml/2006/compatibility" xmlns:p15="http://schemas.microsoft.com/office/powerpoint/2012/main">
       <p:transition spd="slow">
         <p:fade/>
       </p:transition>
@@ -44930,7 +44923,7 @@
         <p:fade thruBlk="1"/>
       </p:transition>
     </mc:Choice>
-    <mc:Fallback xmlns:p15="http://schemas.microsoft.com/office/powerpoint/2012/main" xmlns:com="http://schemas.openxmlformats.org/drawingml/2006/compatibility" xmlns:pvml="urn:schemas-microsoft-com:office:powerpoint" xmlns:v="urn:schemas-microsoft-com:vml" xmlns:o="urn:schemas-microsoft-com:office:office" xmlns:dgm="http://schemas.openxmlformats.org/drawingml/2006/diagram" xmlns:c="http://schemas.openxmlformats.org/drawingml/2006/chart" xmlns:mv="urn:schemas-microsoft-com:mac:vml" xmlns="">
+    <mc:Fallback xmlns="" xmlns:mv="urn:schemas-microsoft-com:mac:vml" xmlns:c="http://schemas.openxmlformats.org/drawingml/2006/chart" xmlns:dgm="http://schemas.openxmlformats.org/drawingml/2006/diagram" xmlns:o="urn:schemas-microsoft-com:office:office" xmlns:v="urn:schemas-microsoft-com:vml" xmlns:pvml="urn:schemas-microsoft-com:office:powerpoint" xmlns:com="http://schemas.openxmlformats.org/drawingml/2006/compatibility" xmlns:p15="http://schemas.microsoft.com/office/powerpoint/2012/main">
       <p:transition spd="slow">
         <p:fade/>
       </p:transition>
@@ -45682,7 +45675,7 @@
         <p:fade thruBlk="1"/>
       </p:transition>
     </mc:Choice>
-    <mc:Fallback xmlns:p15="http://schemas.microsoft.com/office/powerpoint/2012/main" xmlns:com="http://schemas.openxmlformats.org/drawingml/2006/compatibility" xmlns:pvml="urn:schemas-microsoft-com:office:powerpoint" xmlns:v="urn:schemas-microsoft-com:vml" xmlns:o="urn:schemas-microsoft-com:office:office" xmlns:dgm="http://schemas.openxmlformats.org/drawingml/2006/diagram" xmlns:c="http://schemas.openxmlformats.org/drawingml/2006/chart" xmlns:mv="urn:schemas-microsoft-com:mac:vml" xmlns="">
+    <mc:Fallback xmlns="" xmlns:mv="urn:schemas-microsoft-com:mac:vml" xmlns:c="http://schemas.openxmlformats.org/drawingml/2006/chart" xmlns:dgm="http://schemas.openxmlformats.org/drawingml/2006/diagram" xmlns:o="urn:schemas-microsoft-com:office:office" xmlns:v="urn:schemas-microsoft-com:vml" xmlns:pvml="urn:schemas-microsoft-com:office:powerpoint" xmlns:com="http://schemas.openxmlformats.org/drawingml/2006/compatibility" xmlns:p15="http://schemas.microsoft.com/office/powerpoint/2012/main">
       <p:transition spd="slow">
         <p:fade/>
       </p:transition>
@@ -46313,7 +46306,7 @@
         <p:fade thruBlk="1"/>
       </p:transition>
     </mc:Choice>
-    <mc:Fallback xmlns:p15="http://schemas.microsoft.com/office/powerpoint/2012/main" xmlns:com="http://schemas.openxmlformats.org/drawingml/2006/compatibility" xmlns:pvml="urn:schemas-microsoft-com:office:powerpoint" xmlns:v="urn:schemas-microsoft-com:vml" xmlns:o="urn:schemas-microsoft-com:office:office" xmlns:dgm="http://schemas.openxmlformats.org/drawingml/2006/diagram" xmlns:c="http://schemas.openxmlformats.org/drawingml/2006/chart" xmlns:mv="urn:schemas-microsoft-com:mac:vml" xmlns="">
+    <mc:Fallback xmlns="" xmlns:mv="urn:schemas-microsoft-com:mac:vml" xmlns:c="http://schemas.openxmlformats.org/drawingml/2006/chart" xmlns:dgm="http://schemas.openxmlformats.org/drawingml/2006/diagram" xmlns:o="urn:schemas-microsoft-com:office:office" xmlns:v="urn:schemas-microsoft-com:vml" xmlns:pvml="urn:schemas-microsoft-com:office:powerpoint" xmlns:com="http://schemas.openxmlformats.org/drawingml/2006/compatibility" xmlns:p15="http://schemas.microsoft.com/office/powerpoint/2012/main">
       <p:transition spd="slow">
         <p:fade/>
       </p:transition>
@@ -46906,7 +46899,7 @@
         <p:fade thruBlk="1"/>
       </p:transition>
     </mc:Choice>
-    <mc:Fallback xmlns:p15="http://schemas.microsoft.com/office/powerpoint/2012/main" xmlns:com="http://schemas.openxmlformats.org/drawingml/2006/compatibility" xmlns:pvml="urn:schemas-microsoft-com:office:powerpoint" xmlns:v="urn:schemas-microsoft-com:vml" xmlns:o="urn:schemas-microsoft-com:office:office" xmlns:dgm="http://schemas.openxmlformats.org/drawingml/2006/diagram" xmlns:c="http://schemas.openxmlformats.org/drawingml/2006/chart" xmlns:mv="urn:schemas-microsoft-com:mac:vml" xmlns="">
+    <mc:Fallback xmlns="" xmlns:mv="urn:schemas-microsoft-com:mac:vml" xmlns:c="http://schemas.openxmlformats.org/drawingml/2006/chart" xmlns:dgm="http://schemas.openxmlformats.org/drawingml/2006/diagram" xmlns:o="urn:schemas-microsoft-com:office:office" xmlns:v="urn:schemas-microsoft-com:vml" xmlns:pvml="urn:schemas-microsoft-com:office:powerpoint" xmlns:com="http://schemas.openxmlformats.org/drawingml/2006/compatibility" xmlns:p15="http://schemas.microsoft.com/office/powerpoint/2012/main">
       <p:transition spd="slow">
         <p:fade/>
       </p:transition>
@@ -47508,7 +47501,7 @@
         <p:fade thruBlk="1"/>
       </p:transition>
     </mc:Choice>
-    <mc:Fallback xmlns:p15="http://schemas.microsoft.com/office/powerpoint/2012/main" xmlns:com="http://schemas.openxmlformats.org/drawingml/2006/compatibility" xmlns:pvml="urn:schemas-microsoft-com:office:powerpoint" xmlns:v="urn:schemas-microsoft-com:vml" xmlns:o="urn:schemas-microsoft-com:office:office" xmlns:dgm="http://schemas.openxmlformats.org/drawingml/2006/diagram" xmlns:c="http://schemas.openxmlformats.org/drawingml/2006/chart" xmlns:mv="urn:schemas-microsoft-com:mac:vml" xmlns="">
+    <mc:Fallback xmlns="" xmlns:mv="urn:schemas-microsoft-com:mac:vml" xmlns:c="http://schemas.openxmlformats.org/drawingml/2006/chart" xmlns:dgm="http://schemas.openxmlformats.org/drawingml/2006/diagram" xmlns:o="urn:schemas-microsoft-com:office:office" xmlns:v="urn:schemas-microsoft-com:vml" xmlns:pvml="urn:schemas-microsoft-com:office:powerpoint" xmlns:com="http://schemas.openxmlformats.org/drawingml/2006/compatibility" xmlns:p15="http://schemas.microsoft.com/office/powerpoint/2012/main">
       <p:transition spd="slow">
         <p:fade/>
       </p:transition>
@@ -47727,7 +47720,7 @@
         <p:fade thruBlk="1"/>
       </p:transition>
     </mc:Choice>
-    <mc:Fallback xmlns:p15="http://schemas.microsoft.com/office/powerpoint/2012/main" xmlns:com="http://schemas.openxmlformats.org/drawingml/2006/compatibility" xmlns:pvml="urn:schemas-microsoft-com:office:powerpoint" xmlns:v="urn:schemas-microsoft-com:vml" xmlns:o="urn:schemas-microsoft-com:office:office" xmlns:dgm="http://schemas.openxmlformats.org/drawingml/2006/diagram" xmlns:c="http://schemas.openxmlformats.org/drawingml/2006/chart" xmlns:mv="urn:schemas-microsoft-com:mac:vml" xmlns="">
+    <mc:Fallback xmlns="" xmlns:mv="urn:schemas-microsoft-com:mac:vml" xmlns:c="http://schemas.openxmlformats.org/drawingml/2006/chart" xmlns:dgm="http://schemas.openxmlformats.org/drawingml/2006/diagram" xmlns:o="urn:schemas-microsoft-com:office:office" xmlns:v="urn:schemas-microsoft-com:vml" xmlns:pvml="urn:schemas-microsoft-com:office:powerpoint" xmlns:com="http://schemas.openxmlformats.org/drawingml/2006/compatibility" xmlns:p15="http://schemas.microsoft.com/office/powerpoint/2012/main">
       <p:transition spd="slow">
         <p:fade/>
       </p:transition>
@@ -47963,7 +47956,7 @@
         <p:fade thruBlk="1"/>
       </p:transition>
     </mc:Choice>
-    <mc:Fallback xmlns:p15="http://schemas.microsoft.com/office/powerpoint/2012/main" xmlns:com="http://schemas.openxmlformats.org/drawingml/2006/compatibility" xmlns:pvml="urn:schemas-microsoft-com:office:powerpoint" xmlns:v="urn:schemas-microsoft-com:vml" xmlns:o="urn:schemas-microsoft-com:office:office" xmlns:dgm="http://schemas.openxmlformats.org/drawingml/2006/diagram" xmlns:c="http://schemas.openxmlformats.org/drawingml/2006/chart" xmlns:mv="urn:schemas-microsoft-com:mac:vml" xmlns="">
+    <mc:Fallback xmlns="" xmlns:mv="urn:schemas-microsoft-com:mac:vml" xmlns:c="http://schemas.openxmlformats.org/drawingml/2006/chart" xmlns:dgm="http://schemas.openxmlformats.org/drawingml/2006/diagram" xmlns:o="urn:schemas-microsoft-com:office:office" xmlns:v="urn:schemas-microsoft-com:vml" xmlns:pvml="urn:schemas-microsoft-com:office:powerpoint" xmlns:com="http://schemas.openxmlformats.org/drawingml/2006/compatibility" xmlns:p15="http://schemas.microsoft.com/office/powerpoint/2012/main">
       <p:transition spd="slow">
         <p:fade/>
       </p:transition>
@@ -48191,7 +48184,7 @@
         <p:fade thruBlk="1"/>
       </p:transition>
     </mc:Choice>
-    <mc:Fallback xmlns:p15="http://schemas.microsoft.com/office/powerpoint/2012/main" xmlns:com="http://schemas.openxmlformats.org/drawingml/2006/compatibility" xmlns:pvml="urn:schemas-microsoft-com:office:powerpoint" xmlns:v="urn:schemas-microsoft-com:vml" xmlns:o="urn:schemas-microsoft-com:office:office" xmlns:dgm="http://schemas.openxmlformats.org/drawingml/2006/diagram" xmlns:c="http://schemas.openxmlformats.org/drawingml/2006/chart" xmlns:mv="urn:schemas-microsoft-com:mac:vml" xmlns="">
+    <mc:Fallback xmlns="" xmlns:mv="urn:schemas-microsoft-com:mac:vml" xmlns:c="http://schemas.openxmlformats.org/drawingml/2006/chart" xmlns:dgm="http://schemas.openxmlformats.org/drawingml/2006/diagram" xmlns:o="urn:schemas-microsoft-com:office:office" xmlns:v="urn:schemas-microsoft-com:vml" xmlns:pvml="urn:schemas-microsoft-com:office:powerpoint" xmlns:com="http://schemas.openxmlformats.org/drawingml/2006/compatibility" xmlns:p15="http://schemas.microsoft.com/office/powerpoint/2012/main">
       <p:transition spd="slow">
         <p:fade/>
       </p:transition>
@@ -48419,7 +48412,7 @@
         <p:fade thruBlk="1"/>
       </p:transition>
     </mc:Choice>
-    <mc:Fallback xmlns:p15="http://schemas.microsoft.com/office/powerpoint/2012/main" xmlns:com="http://schemas.openxmlformats.org/drawingml/2006/compatibility" xmlns:pvml="urn:schemas-microsoft-com:office:powerpoint" xmlns:v="urn:schemas-microsoft-com:vml" xmlns:o="urn:schemas-microsoft-com:office:office" xmlns:dgm="http://schemas.openxmlformats.org/drawingml/2006/diagram" xmlns:c="http://schemas.openxmlformats.org/drawingml/2006/chart" xmlns:mv="urn:schemas-microsoft-com:mac:vml" xmlns="">
+    <mc:Fallback xmlns="" xmlns:mv="urn:schemas-microsoft-com:mac:vml" xmlns:c="http://schemas.openxmlformats.org/drawingml/2006/chart" xmlns:dgm="http://schemas.openxmlformats.org/drawingml/2006/diagram" xmlns:o="urn:schemas-microsoft-com:office:office" xmlns:v="urn:schemas-microsoft-com:vml" xmlns:pvml="urn:schemas-microsoft-com:office:powerpoint" xmlns:com="http://schemas.openxmlformats.org/drawingml/2006/compatibility" xmlns:p15="http://schemas.microsoft.com/office/powerpoint/2012/main">
       <p:transition spd="slow">
         <p:fade/>
       </p:transition>
@@ -49023,7 +49016,7 @@
         <p:fade thruBlk="1"/>
       </p:transition>
     </mc:Choice>
-    <mc:Fallback xmlns:p15="http://schemas.microsoft.com/office/powerpoint/2012/main" xmlns:com="http://schemas.openxmlformats.org/drawingml/2006/compatibility" xmlns:pvml="urn:schemas-microsoft-com:office:powerpoint" xmlns:v="urn:schemas-microsoft-com:vml" xmlns:o="urn:schemas-microsoft-com:office:office" xmlns:dgm="http://schemas.openxmlformats.org/drawingml/2006/diagram" xmlns:c="http://schemas.openxmlformats.org/drawingml/2006/chart" xmlns:mv="urn:schemas-microsoft-com:mac:vml" xmlns="">
+    <mc:Fallback xmlns="" xmlns:mv="urn:schemas-microsoft-com:mac:vml" xmlns:c="http://schemas.openxmlformats.org/drawingml/2006/chart" xmlns:dgm="http://schemas.openxmlformats.org/drawingml/2006/diagram" xmlns:o="urn:schemas-microsoft-com:office:office" xmlns:v="urn:schemas-microsoft-com:vml" xmlns:pvml="urn:schemas-microsoft-com:office:powerpoint" xmlns:com="http://schemas.openxmlformats.org/drawingml/2006/compatibility" xmlns:p15="http://schemas.microsoft.com/office/powerpoint/2012/main">
       <p:transition spd="slow">
         <p:fade/>
       </p:transition>
@@ -49667,7 +49660,7 @@
         <p:fade thruBlk="1"/>
       </p:transition>
     </mc:Choice>
-    <mc:Fallback xmlns:p15="http://schemas.microsoft.com/office/powerpoint/2012/main" xmlns:com="http://schemas.openxmlformats.org/drawingml/2006/compatibility" xmlns:pvml="urn:schemas-microsoft-com:office:powerpoint" xmlns:v="urn:schemas-microsoft-com:vml" xmlns:o="urn:schemas-microsoft-com:office:office" xmlns:dgm="http://schemas.openxmlformats.org/drawingml/2006/diagram" xmlns:c="http://schemas.openxmlformats.org/drawingml/2006/chart" xmlns:mv="urn:schemas-microsoft-com:mac:vml" xmlns="">
+    <mc:Fallback xmlns="" xmlns:mv="urn:schemas-microsoft-com:mac:vml" xmlns:c="http://schemas.openxmlformats.org/drawingml/2006/chart" xmlns:dgm="http://schemas.openxmlformats.org/drawingml/2006/diagram" xmlns:o="urn:schemas-microsoft-com:office:office" xmlns:v="urn:schemas-microsoft-com:vml" xmlns:pvml="urn:schemas-microsoft-com:office:powerpoint" xmlns:com="http://schemas.openxmlformats.org/drawingml/2006/compatibility" xmlns:p15="http://schemas.microsoft.com/office/powerpoint/2012/main">
       <p:transition spd="slow">
         <p:fade/>
       </p:transition>
@@ -50013,7 +50006,7 @@
         <p:fade thruBlk="1"/>
       </p:transition>
     </mc:Choice>
-    <mc:Fallback xmlns:p15="http://schemas.microsoft.com/office/powerpoint/2012/main" xmlns:com="http://schemas.openxmlformats.org/drawingml/2006/compatibility" xmlns:pvml="urn:schemas-microsoft-com:office:powerpoint" xmlns:v="urn:schemas-microsoft-com:vml" xmlns:o="urn:schemas-microsoft-com:office:office" xmlns:dgm="http://schemas.openxmlformats.org/drawingml/2006/diagram" xmlns:c="http://schemas.openxmlformats.org/drawingml/2006/chart" xmlns:mv="urn:schemas-microsoft-com:mac:vml" xmlns="">
+    <mc:Fallback xmlns="" xmlns:mv="urn:schemas-microsoft-com:mac:vml" xmlns:c="http://schemas.openxmlformats.org/drawingml/2006/chart" xmlns:dgm="http://schemas.openxmlformats.org/drawingml/2006/diagram" xmlns:o="urn:schemas-microsoft-com:office:office" xmlns:v="urn:schemas-microsoft-com:vml" xmlns:pvml="urn:schemas-microsoft-com:office:powerpoint" xmlns:com="http://schemas.openxmlformats.org/drawingml/2006/compatibility" xmlns:p15="http://schemas.microsoft.com/office/powerpoint/2012/main">
       <p:transition spd="slow">
         <p:fade/>
       </p:transition>
@@ -50364,7 +50357,7 @@
         <p:fade thruBlk="1"/>
       </p:transition>
     </mc:Choice>
-    <mc:Fallback xmlns:p15="http://schemas.microsoft.com/office/powerpoint/2012/main" xmlns:com="http://schemas.openxmlformats.org/drawingml/2006/compatibility" xmlns:pvml="urn:schemas-microsoft-com:office:powerpoint" xmlns:v="urn:schemas-microsoft-com:vml" xmlns:o="urn:schemas-microsoft-com:office:office" xmlns:dgm="http://schemas.openxmlformats.org/drawingml/2006/diagram" xmlns:c="http://schemas.openxmlformats.org/drawingml/2006/chart" xmlns:mv="urn:schemas-microsoft-com:mac:vml" xmlns="">
+    <mc:Fallback xmlns="" xmlns:mv="urn:schemas-microsoft-com:mac:vml" xmlns:c="http://schemas.openxmlformats.org/drawingml/2006/chart" xmlns:dgm="http://schemas.openxmlformats.org/drawingml/2006/diagram" xmlns:o="urn:schemas-microsoft-com:office:office" xmlns:v="urn:schemas-microsoft-com:vml" xmlns:pvml="urn:schemas-microsoft-com:office:powerpoint" xmlns:com="http://schemas.openxmlformats.org/drawingml/2006/compatibility" xmlns:p15="http://schemas.microsoft.com/office/powerpoint/2012/main">
       <p:transition spd="slow">
         <p:fade/>
       </p:transition>
@@ -50708,7 +50701,7 @@
         <p:fade thruBlk="1"/>
       </p:transition>
     </mc:Choice>
-    <mc:Fallback xmlns:p15="http://schemas.microsoft.com/office/powerpoint/2012/main" xmlns:com="http://schemas.openxmlformats.org/drawingml/2006/compatibility" xmlns:pvml="urn:schemas-microsoft-com:office:powerpoint" xmlns:v="urn:schemas-microsoft-com:vml" xmlns:o="urn:schemas-microsoft-com:office:office" xmlns:dgm="http://schemas.openxmlformats.org/drawingml/2006/diagram" xmlns:c="http://schemas.openxmlformats.org/drawingml/2006/chart" xmlns:mv="urn:schemas-microsoft-com:mac:vml" xmlns="">
+    <mc:Fallback xmlns="" xmlns:mv="urn:schemas-microsoft-com:mac:vml" xmlns:c="http://schemas.openxmlformats.org/drawingml/2006/chart" xmlns:dgm="http://schemas.openxmlformats.org/drawingml/2006/diagram" xmlns:o="urn:schemas-microsoft-com:office:office" xmlns:v="urn:schemas-microsoft-com:vml" xmlns:pvml="urn:schemas-microsoft-com:office:powerpoint" xmlns:com="http://schemas.openxmlformats.org/drawingml/2006/compatibility" xmlns:p15="http://schemas.microsoft.com/office/powerpoint/2012/main">
       <p:transition spd="slow">
         <p:fade/>
       </p:transition>
@@ -51245,7 +51238,7 @@
         <p:fade thruBlk="1"/>
       </p:transition>
     </mc:Choice>
-    <mc:Fallback xmlns:p15="http://schemas.microsoft.com/office/powerpoint/2012/main" xmlns:com="http://schemas.openxmlformats.org/drawingml/2006/compatibility" xmlns:pvml="urn:schemas-microsoft-com:office:powerpoint" xmlns:v="urn:schemas-microsoft-com:vml" xmlns:o="urn:schemas-microsoft-com:office:office" xmlns:dgm="http://schemas.openxmlformats.org/drawingml/2006/diagram" xmlns:c="http://schemas.openxmlformats.org/drawingml/2006/chart" xmlns:mv="urn:schemas-microsoft-com:mac:vml" xmlns="">
+    <mc:Fallback xmlns="" xmlns:mv="urn:schemas-microsoft-com:mac:vml" xmlns:c="http://schemas.openxmlformats.org/drawingml/2006/chart" xmlns:dgm="http://schemas.openxmlformats.org/drawingml/2006/diagram" xmlns:o="urn:schemas-microsoft-com:office:office" xmlns:v="urn:schemas-microsoft-com:vml" xmlns:pvml="urn:schemas-microsoft-com:office:powerpoint" xmlns:com="http://schemas.openxmlformats.org/drawingml/2006/compatibility" xmlns:p15="http://schemas.microsoft.com/office/powerpoint/2012/main">
       <p:transition spd="slow">
         <p:fade/>
       </p:transition>
@@ -51962,7 +51955,7 @@
         <p:fade thruBlk="1"/>
       </p:transition>
     </mc:Choice>
-    <mc:Fallback xmlns:p15="http://schemas.microsoft.com/office/powerpoint/2012/main" xmlns:com="http://schemas.openxmlformats.org/drawingml/2006/compatibility" xmlns:pvml="urn:schemas-microsoft-com:office:powerpoint" xmlns:v="urn:schemas-microsoft-com:vml" xmlns:o="urn:schemas-microsoft-com:office:office" xmlns:dgm="http://schemas.openxmlformats.org/drawingml/2006/diagram" xmlns:c="http://schemas.openxmlformats.org/drawingml/2006/chart" xmlns:mv="urn:schemas-microsoft-com:mac:vml" xmlns="">
+    <mc:Fallback xmlns="" xmlns:mv="urn:schemas-microsoft-com:mac:vml" xmlns:c="http://schemas.openxmlformats.org/drawingml/2006/chart" xmlns:dgm="http://schemas.openxmlformats.org/drawingml/2006/diagram" xmlns:o="urn:schemas-microsoft-com:office:office" xmlns:v="urn:schemas-microsoft-com:vml" xmlns:pvml="urn:schemas-microsoft-com:office:powerpoint" xmlns:com="http://schemas.openxmlformats.org/drawingml/2006/compatibility" xmlns:p15="http://schemas.microsoft.com/office/powerpoint/2012/main">
       <p:transition spd="slow">
         <p:fade/>
       </p:transition>
@@ -52203,7 +52196,7 @@
         <p:fade thruBlk="1"/>
       </p:transition>
     </mc:Choice>
-    <mc:Fallback xmlns:p15="http://schemas.microsoft.com/office/powerpoint/2012/main" xmlns:com="http://schemas.openxmlformats.org/drawingml/2006/compatibility" xmlns:pvml="urn:schemas-microsoft-com:office:powerpoint" xmlns:v="urn:schemas-microsoft-com:vml" xmlns:o="urn:schemas-microsoft-com:office:office" xmlns:dgm="http://schemas.openxmlformats.org/drawingml/2006/diagram" xmlns:c="http://schemas.openxmlformats.org/drawingml/2006/chart" xmlns:mv="urn:schemas-microsoft-com:mac:vml" xmlns="">
+    <mc:Fallback xmlns="" xmlns:mv="urn:schemas-microsoft-com:mac:vml" xmlns:c="http://schemas.openxmlformats.org/drawingml/2006/chart" xmlns:dgm="http://schemas.openxmlformats.org/drawingml/2006/diagram" xmlns:o="urn:schemas-microsoft-com:office:office" xmlns:v="urn:schemas-microsoft-com:vml" xmlns:pvml="urn:schemas-microsoft-com:office:powerpoint" xmlns:com="http://schemas.openxmlformats.org/drawingml/2006/compatibility" xmlns:p15="http://schemas.microsoft.com/office/powerpoint/2012/main">
       <p:transition spd="slow">
         <p:fade/>
       </p:transition>
@@ -52802,7 +52795,7 @@
         <p:fade thruBlk="1"/>
       </p:transition>
     </mc:Choice>
-    <mc:Fallback xmlns:p15="http://schemas.microsoft.com/office/powerpoint/2012/main" xmlns:com="http://schemas.openxmlformats.org/drawingml/2006/compatibility" xmlns:pvml="urn:schemas-microsoft-com:office:powerpoint" xmlns:v="urn:schemas-microsoft-com:vml" xmlns:o="urn:schemas-microsoft-com:office:office" xmlns:dgm="http://schemas.openxmlformats.org/drawingml/2006/diagram" xmlns:c="http://schemas.openxmlformats.org/drawingml/2006/chart" xmlns:mv="urn:schemas-microsoft-com:mac:vml" xmlns="">
+    <mc:Fallback xmlns="" xmlns:mv="urn:schemas-microsoft-com:mac:vml" xmlns:c="http://schemas.openxmlformats.org/drawingml/2006/chart" xmlns:dgm="http://schemas.openxmlformats.org/drawingml/2006/diagram" xmlns:o="urn:schemas-microsoft-com:office:office" xmlns:v="urn:schemas-microsoft-com:vml" xmlns:pvml="urn:schemas-microsoft-com:office:powerpoint" xmlns:com="http://schemas.openxmlformats.org/drawingml/2006/compatibility" xmlns:p15="http://schemas.microsoft.com/office/powerpoint/2012/main">
       <p:transition spd="slow">
         <p:fade/>
       </p:transition>
@@ -53376,7 +53369,7 @@
         <p:fade thruBlk="1"/>
       </p:transition>
     </mc:Choice>
-    <mc:Fallback xmlns:p15="http://schemas.microsoft.com/office/powerpoint/2012/main" xmlns:com="http://schemas.openxmlformats.org/drawingml/2006/compatibility" xmlns:pvml="urn:schemas-microsoft-com:office:powerpoint" xmlns:v="urn:schemas-microsoft-com:vml" xmlns:o="urn:schemas-microsoft-com:office:office" xmlns:dgm="http://schemas.openxmlformats.org/drawingml/2006/diagram" xmlns:c="http://schemas.openxmlformats.org/drawingml/2006/chart" xmlns:mv="urn:schemas-microsoft-com:mac:vml" xmlns="">
+    <mc:Fallback xmlns="" xmlns:mv="urn:schemas-microsoft-com:mac:vml" xmlns:c="http://schemas.openxmlformats.org/drawingml/2006/chart" xmlns:dgm="http://schemas.openxmlformats.org/drawingml/2006/diagram" xmlns:o="urn:schemas-microsoft-com:office:office" xmlns:v="urn:schemas-microsoft-com:vml" xmlns:pvml="urn:schemas-microsoft-com:office:powerpoint" xmlns:com="http://schemas.openxmlformats.org/drawingml/2006/compatibility" xmlns:p15="http://schemas.microsoft.com/office/powerpoint/2012/main">
       <p:transition spd="slow">
         <p:fade/>
       </p:transition>
@@ -54026,7 +54019,7 @@
         <p:fade thruBlk="1"/>
       </p:transition>
     </mc:Choice>
-    <mc:Fallback xmlns:p15="http://schemas.microsoft.com/office/powerpoint/2012/main" xmlns:com="http://schemas.openxmlformats.org/drawingml/2006/compatibility" xmlns:pvml="urn:schemas-microsoft-com:office:powerpoint" xmlns:v="urn:schemas-microsoft-com:vml" xmlns:o="urn:schemas-microsoft-com:office:office" xmlns:dgm="http://schemas.openxmlformats.org/drawingml/2006/diagram" xmlns:c="http://schemas.openxmlformats.org/drawingml/2006/chart" xmlns:mv="urn:schemas-microsoft-com:mac:vml" xmlns="">
+    <mc:Fallback xmlns="" xmlns:mv="urn:schemas-microsoft-com:mac:vml" xmlns:c="http://schemas.openxmlformats.org/drawingml/2006/chart" xmlns:dgm="http://schemas.openxmlformats.org/drawingml/2006/diagram" xmlns:o="urn:schemas-microsoft-com:office:office" xmlns:v="urn:schemas-microsoft-com:vml" xmlns:pvml="urn:schemas-microsoft-com:office:powerpoint" xmlns:com="http://schemas.openxmlformats.org/drawingml/2006/compatibility" xmlns:p15="http://schemas.microsoft.com/office/powerpoint/2012/main">
       <p:transition spd="slow">
         <p:fade/>
       </p:transition>
@@ -54445,7 +54438,7 @@
         <p:fade thruBlk="1"/>
       </p:transition>
     </mc:Choice>
-    <mc:Fallback xmlns:p15="http://schemas.microsoft.com/office/powerpoint/2012/main" xmlns:com="http://schemas.openxmlformats.org/drawingml/2006/compatibility" xmlns:pvml="urn:schemas-microsoft-com:office:powerpoint" xmlns:v="urn:schemas-microsoft-com:vml" xmlns:o="urn:schemas-microsoft-com:office:office" xmlns:dgm="http://schemas.openxmlformats.org/drawingml/2006/diagram" xmlns:c="http://schemas.openxmlformats.org/drawingml/2006/chart" xmlns:mv="urn:schemas-microsoft-com:mac:vml" xmlns="">
+    <mc:Fallback xmlns="" xmlns:mv="urn:schemas-microsoft-com:mac:vml" xmlns:c="http://schemas.openxmlformats.org/drawingml/2006/chart" xmlns:dgm="http://schemas.openxmlformats.org/drawingml/2006/diagram" xmlns:o="urn:schemas-microsoft-com:office:office" xmlns:v="urn:schemas-microsoft-com:vml" xmlns:pvml="urn:schemas-microsoft-com:office:powerpoint" xmlns:com="http://schemas.openxmlformats.org/drawingml/2006/compatibility" xmlns:p15="http://schemas.microsoft.com/office/powerpoint/2012/main">
       <p:transition spd="slow">
         <p:fade/>
       </p:transition>
@@ -55002,7 +54995,7 @@
         <p:fade thruBlk="1"/>
       </p:transition>
     </mc:Choice>
-    <mc:Fallback xmlns:p15="http://schemas.microsoft.com/office/powerpoint/2012/main" xmlns:com="http://schemas.openxmlformats.org/drawingml/2006/compatibility" xmlns:pvml="urn:schemas-microsoft-com:office:powerpoint" xmlns:v="urn:schemas-microsoft-com:vml" xmlns:o="urn:schemas-microsoft-com:office:office" xmlns:dgm="http://schemas.openxmlformats.org/drawingml/2006/diagram" xmlns:c="http://schemas.openxmlformats.org/drawingml/2006/chart" xmlns:mv="urn:schemas-microsoft-com:mac:vml" xmlns="">
+    <mc:Fallback xmlns="" xmlns:mv="urn:schemas-microsoft-com:mac:vml" xmlns:c="http://schemas.openxmlformats.org/drawingml/2006/chart" xmlns:dgm="http://schemas.openxmlformats.org/drawingml/2006/diagram" xmlns:o="urn:schemas-microsoft-com:office:office" xmlns:v="urn:schemas-microsoft-com:vml" xmlns:pvml="urn:schemas-microsoft-com:office:powerpoint" xmlns:com="http://schemas.openxmlformats.org/drawingml/2006/compatibility" xmlns:p15="http://schemas.microsoft.com/office/powerpoint/2012/main">
       <p:transition spd="slow">
         <p:fade/>
       </p:transition>
